--- a/docs/DaoTao/Buoi02_SQLCanBan.pptx
+++ b/docs/DaoTao/Buoi02_SQLCanBan.pptx
@@ -600,17 +600,17 @@
           </a:p>
           <a:p>
             <a:r>
-              <a:t>- JOIN danh mục với chứng từ, master với detail</a:t>
-            </a:r>
-          </a:p>
-          <a:p>
-            <a:r>
-              <a:t>- GROUP BY / HAVING để đếm, cộng, tìm trùng</a:t>
-            </a:r>
-          </a:p>
-          <a:p>
-            <a:r>
-              <a:t>- Dùng thành thạo tab SQL Query: chạy, nhiều kết quả, lưu Excel / CSV</a:t>
+              <a:t>- Biết JOIN danh mục với chứng từ, master với detail</a:t>
+            </a:r>
+          </a:p>
+          <a:p>
+            <a:r>
+              <a:t>- Dùng GROUP BY / HAVING để đếm, cộng, tìm trùng</a:t>
+            </a:r>
+          </a:p>
+          <a:p>
+            <a:r>
+              <a:t>- Dùng thành thạo tab SQL Query: chạy lệnh, xem nhiều kết quả, lưu Excel / CSV</a:t>
             </a:r>
           </a:p>
           <a:p>
@@ -625,7 +625,7 @@
           </a:p>
           <a:p>
             <a:r>
-              <a:t>2. JOIN, đọc thuộc tính information để biết ghép bảng (40')</a:t>
+              <a:t>2. JOIN, đọc thuộc tính information để biết cách ghép bảng (40')</a:t>
             </a:r>
           </a:p>
           <a:p>
@@ -715,22 +715,22 @@
           <a:lstStyle/>
           <a:p>
             <a:r>
-              <a:t>Câu SELECT cơ bản trên dmkh. Nhắc các toán tử: =, &lt;&gt;, LIKE với % và _, IN, BETWEEN, IS NULL.</a:t>
-            </a:r>
-          </a:p>
-          <a:p>
-            <a:r>
-              <a:t>Chuỗi tiếng Việt phải có tiền tố N, ví dụ N'Bộ phận' — thiếu N thì mất dấu.</a:t>
-            </a:r>
-          </a:p>
-          <a:p>
-            <a:r>
-              <a:t>GROUP BY để đếm / cộng theo nhóm; HAVING để lọc sau khi nhóm. Câu tìm tên trùng rất hay dùng khi dọn dữ liệu danh mục.</a:t>
-            </a:r>
-          </a:p>
-          <a:p>
-            <a:r>
-              <a:t>Cho học viên tự chạy trên dự án thử: đổi điều kiện LIKE, thêm cột.</a:t>
+              <a:t>Câu SELECT cơ bản trên bảng khách hàng dmkh. Nhắc lại các toán tử: =, &lt;&gt;, LIKE với ký tự đại diện % (nhiều ký tự bất kỳ) và _ (đúng một ký tự), IN, BETWEEN, IS NULL.</a:t>
+            </a:r>
+          </a:p>
+          <a:p>
+            <a:r>
+              <a:t>Chuỗi tiếng Việt phải có tiền tố N, ví dụ N'Bộ phận' — thiếu N thì chữ sẽ bị mất dấu.</a:t>
+            </a:r>
+          </a:p>
+          <a:p>
+            <a:r>
+              <a:t>GROUP BY dùng để đếm hoặc cộng theo nhóm; HAVING dùng để lọc sau khi đã nhóm. Câu tìm tên khách bị trùng rất hay dùng khi dọn dữ liệu danh mục.</a:t>
+            </a:r>
+          </a:p>
+          <a:p>
+            <a:r>
+              <a:t>Cho học viên tự chạy trên dự án thử: đổi điều kiện LIKE, thêm cột vào danh sách SELECT.</a:t>
             </a:r>
           </a:p>
         </p:txBody>
@@ -800,22 +800,22 @@
           <a:lstStyle/>
           <a:p>
             <a:r>
-              <a:t>Muốn biết ghép bảng nào thì nhìn thuộc tính information của field tra cứu trong controller: ma_nvbh$dmnvbh.ten_nvbh%l nghĩa là dmkh.ma_nvbh ghép dmnvbh lấy ten_nvbh.</a:t>
-            </a:r>
-          </a:p>
-          <a:p>
-            <a:r>
-              <a:t>INNER JOIN chỉ lấy dòng có ở cả hai bên; LEFT JOIN giữ hết bảng trái.</a:t>
-            </a:r>
-          </a:p>
-          <a:p>
-            <a:r>
-              <a:t>Luôn đặt bí danh vì Fast có nhiều cột trùng tên (status, ma_dvcs...).</a:t>
-            </a:r>
-          </a:p>
-          <a:p>
-            <a:r>
-              <a:t>Ví dụ 2: chứng từ master + detail nối bằng stt_rec. Lọc ngày dùng dạng yyyymmdd và khoảng nửa mở (&gt;= đầu tháng, &lt; đầu tháng sau).</a:t>
+              <a:t>Muốn biết cần ghép bảng nào thì nhìn thuộc tính information của field tra cứu trong controller: ma_nvbh$dmnvbh.ten_nvbh%l nghĩa là lấy dmkh.ma_nvbh ghép với bảng dmnvbh để lấy cột ten_nvbh.</a:t>
+            </a:r>
+          </a:p>
+          <a:p>
+            <a:r>
+              <a:t>INNER JOIN chỉ lấy những dòng có ở cả hai bảng; LEFT JOIN giữ lại toàn bộ dòng của bảng bên trái.</a:t>
+            </a:r>
+          </a:p>
+          <a:p>
+            <a:r>
+              <a:t>Luôn đặt bí danh cho bảng (a, b...) vì Fast có nhiều cột trùng tên giữa các bảng (status, ma_dvcs...).</a:t>
+            </a:r>
+          </a:p>
+          <a:p>
+            <a:r>
+              <a:t>Ví dụ 2: chứng từ gồm master và detail, nối với nhau bằng stt_rec. Lọc ngày thì viết ngày dạng yyyymmdd và dùng khoảng nửa mở: lớn hơn hoặc bằng ngày đầu tháng, nhỏ hơn ngày đầu tháng sau.</a:t>
             </a:r>
           </a:p>
         </p:txBody>
@@ -885,22 +885,22 @@
           <a:lstStyle/>
           <a:p>
             <a:r>
-              <a:t>Bảng tạm #temp sống tới hết kết nối / hết procedure — dùng nhiều trong procedure Fast. Biến bảng @t nhỏ, sống trong một batch. CTE (WITH ... AS) giúp đặt tên cho truy vấn con, kết hợp ROW_NUMBER để tìm bản trùng.</a:t>
-            </a:r>
-          </a:p>
-          <a:p>
-            <a:r>
-              <a:t>Mẹo của Fast: SELECT TOP 0 ... INTO #report FROM bảng để tạo bảng tạm đúng kiểu cột rồi mới INSERT.</a:t>
-            </a:r>
-          </a:p>
-          <a:p>
-            <a:r>
-              <a:t>Kiểu dữ liệu: mã là varchar, độ dài theo bảng gốc — luôn xem cấu trúc ở tab Table; tên là nvarchar; tiền / số lượng numeric(19,4); ngày smalldatetime; tháng năm là int riêng.</a:t>
-            </a:r>
-          </a:p>
-          <a:p>
-            <a:r>
-              <a:t>Ngày tháng: dùng chuỗi 'yyyymmdd', không dùng '01/02/2026' vì phụ thuộc cài đặt ngôn ngữ.</a:t>
+              <a:t>Bảng tạm #temp tồn tại tới khi hết kết nối hoặc hết procedure — được dùng rất nhiều trong procedure của Fast. Biến bảng @t dùng cho dữ liệu nhỏ, chỉ tồn tại trong một batch. CTE (WITH ... AS) giúp đặt tên cho truy vấn con; kết hợp với ROW_NUMBER để tìm bản ghi trùng.</a:t>
+            </a:r>
+          </a:p>
+          <a:p>
+            <a:r>
+              <a:t>Mẹo của Fast: SELECT TOP 0 ... INTO #report FROM bảng để tạo bảng tạm có đúng kiểu cột như bảng thật, rồi mới INSERT dữ liệu vào.</a:t>
+            </a:r>
+          </a:p>
+          <a:p>
+            <a:r>
+              <a:t>Kiểu dữ liệu: cột mã là varchar, độ dài theo bảng gốc — luôn xem cấu trúc bảng ở tab Table; cột tên là nvarchar; tiền và số lượng là numeric(19,4); ngày là smalldatetime; tháng và năm là các cột int riêng.</a:t>
+            </a:r>
+          </a:p>
+          <a:p>
+            <a:r>
+              <a:t>Ngày tháng: viết dạng chuỗi 'yyyymmdd', không viết '01/02/2026' vì cách hiểu dạng này phụ thuộc cài đặt ngôn ngữ của SQL Server.</a:t>
             </a:r>
           </a:p>
         </p:txBody>
@@ -970,22 +970,22 @@
           <a:lstStyle/>
           <a:p>
             <a:r>
-              <a:t>Ctrl+Shift+Q mở tab SQL Query. F5 hoặc Ctrl+Enter chạy — có bôi đen thì chỉ chạy đoạn bôi đen. Alt+F5 dừng.</a:t>
-            </a:r>
-          </a:p>
-          <a:p>
-            <a:r>
-              <a:t>Nhiều bảng kết quả: chọn Xếp chồng hoặc Từng tab. Chọn nhiều ô số thì thanh dưới hiện Sum / Count / Average.</a:t>
-            </a:r>
-          </a:p>
-          <a:p>
-            <a:r>
-              <a:t>Lỗi: tab Message tự mở, bấm "dòng N" để nhảy tới dòng lỗi.</a:t>
-            </a:r>
-          </a:p>
-          <a:p>
-            <a:r>
-              <a:t>Ctrl+S lưu file .sql, Ctrl+F tìm, F7 định dạng code, F12 xem nhanh bảng / procedure dưới con trỏ, Ctrl+I nhờ AI viết / sửa SQL (cần API key), Check Fields kiểm tra cột tồn tại mà không chạy thật.</a:t>
+              <a:t>Ctrl+Shift+Q mở tab SQL Query. Bấm F5 hoặc Ctrl+Enter để chạy — nếu đang bôi đen một đoạn thì chỉ chạy đoạn đó. Alt+F5 để dừng câu đang chạy.</a:t>
+            </a:r>
+          </a:p>
+          <a:p>
+            <a:r>
+              <a:t>Khi có nhiều bảng kết quả: chọn hiển thị Xếp chồng (các bảng chồng lên nhau) hoặc Từng tab. Chọn nhiều ô số thì thanh dưới cùng hiện Sum / Count / Average của các ô đó.</a:t>
+            </a:r>
+          </a:p>
+          <a:p>
+            <a:r>
+              <a:t>Khi lỗi: tab Message tự mở, bấm vào chữ "dòng N" để nhảy tới dòng bị lỗi.</a:t>
+            </a:r>
+          </a:p>
+          <a:p>
+            <a:r>
+              <a:t>Ctrl+S lưu thành file .sql, Ctrl+F tìm, F7 định dạng lại code (Beauty), F12 xem nhanh bảng hoặc procedure dưới con trỏ, Ctrl+I nhờ AI viết hoặc sửa SQL (cần API key), Check Fields kiểm tra các cột có tồn tại không mà không chạy câu lệnh thật.</a:t>
             </a:r>
           </a:p>
         </p:txBody>
@@ -1055,22 +1055,22 @@
           <a:lstStyle/>
           <a:p>
             <a:r>
-              <a:t>Ba nhóm tính năng hay dùng ở SQL Query.</a:t>
-            </a:r>
-          </a:p>
-          <a:p>
-            <a:r>
-              <a:t>Excel / CSV: Ctrl+E ở lưới kết quả xuất nhanh ra Excel vào thư mục tạm rồi mở luôn. Muốn lưu đúng chỗ thì chuột phải → Lưu ra file → Save as Excel hoặc Save as CSV. Lưu toàn bộ dòng của bảng, kể cả khi lưới không hiện hết. Excel giữ được số 0 đầu của mã; CSV mở bằng Excel thì Excel tự đoán kiểu, có thể mất số 0.</a:t>
-            </a:r>
-          </a:p>
-          <a:p>
-            <a:r>
-              <a:t>Debug: chỉ có ở chế độ Web. Mỗi bước chạy lại trong BEGIN TRAN rồi luôn ROLLBACK, nên an toàn nhưng script nặng sẽ chậm.</a:t>
-            </a:r>
-          </a:p>
-          <a:p>
-            <a:r>
-              <a:t>Lịch sử: Bcode không tự lưu mọi câu chạy, phải Ctrl+Alt+H. Nhưng mọi lần CREATE / ALTER procedure, function, view, trigger thì Bcode tự ghi phiên bản — rất hữu ích khi cần rollback (chương 7).</a:t>
+              <a:t>Ba nhóm tính năng hay dùng trong tab SQL Query.</a:t>
+            </a:r>
+          </a:p>
+          <a:p>
+            <a:r>
+              <a:t>Excel / CSV: bấm Ctrl+E ở lưới kết quả để xuất nhanh ra Excel vào thư mục tạm rồi mở file luôn. Muốn lưu vào đúng chỗ mình chọn thì chuột phải → Lưu ra file → Save as Excel hoặc Save as CSV. Bcode lưu toàn bộ dòng của bảng kết quả, kể cả khi lưới chưa hiện hết. File Excel giữ được số 0 ở đầu mã; còn file CSV khi mở bằng Excel thì Excel tự đoán kiểu dữ liệu, có thể làm mất số 0 đầu mã.</a:t>
+            </a:r>
+          </a:p>
+          <a:p>
+            <a:r>
+              <a:t>Debug từng bước: chỉ có ở chế độ giao diện Web. Mỗi bước được chạy lại trong BEGIN TRAN rồi luôn ROLLBACK, nên an toàn cho dữ liệu, nhưng script nặng sẽ chạy chậm.</a:t>
+            </a:r>
+          </a:p>
+          <a:p>
+            <a:r>
+              <a:t>Lịch sử: Bcode không tự lưu mọi câu đã chạy, muốn lưu thì bấm Ctrl+Alt+H. Riêng mọi lần CREATE / ALTER procedure, function, view, trigger thì Bcode tự ghi lại phiên bản — rất hữu ích khi cần quay lại bản cũ (chương 7).</a:t>
             </a:r>
           </a:p>
         </p:txBody>
@@ -1145,7 +1145,7 @@
           </a:p>
           <a:p>
             <a:r>
-              <a:t>Bài tập về nhà: Viết 5 câu truy vấn trả lời 5 câu hỏi nghiệp vụ người hướng dẫn giao (vd khách nào chưa phát sinh chứng từ trong năm).</a:t>
+              <a:t>Bài tập về nhà: Viết 5 câu truy vấn trả lời 5 câu hỏi nghiệp vụ do người hướng dẫn giao (ví dụ: khách nào chưa phát sinh chứng từ trong năm).</a:t>
             </a:r>
           </a:p>
         </p:txBody>
@@ -1220,12 +1220,12 @@
           </a:p>
           <a:p>
             <a:r>
-              <a:t>1. Thiếu N thì chuỗi tiếng Việt bị mất dấu (không phải unicode).</a:t>
-            </a:r>
-          </a:p>
-          <a:p>
-            <a:r>
-              <a:t>2. INNER chỉ lấy dòng có ở cả 2 bảng; LEFT giữ hết bảng trái, bên phải không có thì NULL.</a:t>
+              <a:t>1. Thiếu N thì chuỗi không phải Unicode, nên tiếng Việt bị mất dấu.</a:t>
+            </a:r>
+          </a:p>
+          <a:p>
+            <a:r>
+              <a:t>2. INNER chỉ lấy dòng khớp ở cả 2 bảng; LEFT giữ mọi dòng bảng trái, cột bảng phải để NULL nếu không khớp.</a:t>
             </a:r>
           </a:p>
           <a:p>
@@ -4823,7 +4823,7 @@
                 <a:ea typeface="Segoe UI"/>
                 <a:cs typeface="Segoe UI"/>
               </a:rPr>
-              <a:t>JOIN danh mục với chứng từ, master với detail</a:t>
+              <a:t>Biết JOIN danh mục với chứng từ, master với detail</a:t>
             </a:r>
           </a:p>
           <a:p>
@@ -4852,7 +4852,7 @@
                 <a:ea typeface="Segoe UI"/>
                 <a:cs typeface="Segoe UI"/>
               </a:rPr>
-              <a:t>GROUP BY / HAVING để đếm, cộng, tìm trùng</a:t>
+              <a:t>Dùng GROUP BY / HAVING để đếm, cộng, tìm trùng</a:t>
             </a:r>
           </a:p>
           <a:p>
@@ -4881,7 +4881,7 @@
                 <a:ea typeface="Segoe UI"/>
                 <a:cs typeface="Segoe UI"/>
               </a:rPr>
-              <a:t>Dùng thành thạo tab SQL Query: chạy, nhiều kết quả, lưu Excel / CSV</a:t>
+              <a:t>Dùng thành thạo tab SQL Query: chạy lệnh, xem nhiều kết quả, lưu Excel / CSV</a:t>
             </a:r>
           </a:p>
         </p:txBody>
@@ -5096,7 +5096,7 @@
                           <a:ea typeface="Segoe UI"/>
                           <a:cs typeface="Segoe UI"/>
                         </a:rPr>
-                        <a:t>JOIN, đọc thuộc tính information để biết ghép bảng</a:t>
+                        <a:t>JOIN, đọc thuộc tính information để biết cách ghép bảng</a:t>
                       </a:r>
                     </a:p>
                   </a:txBody>
@@ -6568,7 +6568,7 @@
                 <a:ea typeface="Segoe UI"/>
                 <a:cs typeface="Segoe UI"/>
               </a:rPr>
-              <a:t> nhiều ký tự, </a:t>
+              <a:t> khớp nhiều ký tự, </a:t>
             </a:r>
             <a:r>
               <a:rPr sz="1600" b="0" i="0">
@@ -6590,7 +6590,7 @@
                 <a:ea typeface="Segoe UI"/>
                 <a:cs typeface="Segoe UI"/>
               </a:rPr>
-              <a:t> một ký tự</a:t>
+              <a:t> khớp một</a:t>
             </a:r>
           </a:p>
           <a:p>
@@ -6714,7 +6714,7 @@
                 <a:ea typeface="Segoe UI"/>
                 <a:cs typeface="Segoe UI"/>
               </a:rPr>
-              <a:t> (thiếu N mất dấu)</a:t>
+              <a:t> (thiếu N sẽ mất dấu)</a:t>
             </a:r>
           </a:p>
           <a:p>
@@ -7855,7 +7855,7 @@
                 <a:ea typeface="Segoe UI"/>
                 <a:cs typeface="Segoe UI"/>
               </a:rPr>
-              <a:t> </a:t>
+              <a:t> bảng </a:t>
             </a:r>
             <a:r>
               <a:rPr sz="1600" b="0" i="0">
@@ -8479,7 +8479,7 @@
                           <a:ea typeface="Segoe UI"/>
                           <a:cs typeface="Segoe UI"/>
                         </a:rPr>
-                        <a:t> cột mã nguồn</a:t>
+                        <a:t> với cột mã nguồn</a:t>
                       </a:r>
                     </a:p>
                   </a:txBody>
@@ -8553,7 +8553,7 @@
                           <a:ea typeface="Segoe UI"/>
                           <a:cs typeface="Segoe UI"/>
                         </a:rPr>
-                        <a:t>Tiếng Việt → nvarchar + </a:t>
+                        <a:t>Tiếng Việt: nvarchar và </a:t>
                       </a:r>
                       <a:r>
                         <a:rPr sz="1400" b="0" i="0">
@@ -8712,7 +8712,7 @@
                           <a:ea typeface="Segoe UI"/>
                           <a:cs typeface="Segoe UI"/>
                         </a:rPr>
-                        <a:t>1900 → 2079, chính xác tới phút</a:t>
+                        <a:t>Từ 1900 đến 2079, chính xác tới phút</a:t>
                       </a:r>
                     </a:p>
                   </a:txBody>
@@ -8797,7 +8797,7 @@
                           <a:ea typeface="Segoe UI"/>
                           <a:cs typeface="Segoe UI"/>
                         </a:rPr>
-                        <a:t>Tháng / năm là </a:t>
+                        <a:t>Tháng, năm là </a:t>
                       </a:r>
                       <a:r>
                         <a:rPr sz="1500" b="1" i="0">
@@ -8891,7 +8891,7 @@
                           <a:ea typeface="Segoe UI"/>
                           <a:cs typeface="Segoe UI"/>
                         </a:rPr>
-                        <a:t>, cờ</a:t>
+                        <a:t>, cờ đánh dấu</a:t>
                       </a:r>
                     </a:p>
                   </a:txBody>
@@ -9109,7 +9109,7 @@
                 <a:ea typeface="Segoe UI"/>
                 <a:cs typeface="Segoe UI"/>
               </a:rPr>
-              <a:t>. Ngày luôn viết </a:t>
+              <a:t>. Ngày luôn viết dạng </a:t>
             </a:r>
             <a:r>
               <a:rPr sz="1400" b="0" i="0">
@@ -9470,7 +9470,7 @@
                 <a:ea typeface="Segoe UI"/>
                 <a:cs typeface="Segoe UI"/>
               </a:rPr>
-              <a:t> chạy (đoạn chọn)</a:t>
+              <a:t> chạy (đoạn chọn nếu có)</a:t>
             </a:r>
           </a:p>
           <a:p>
@@ -9756,6 +9756,17 @@
                 <a:cs typeface="Segoe UI"/>
               </a:rPr>
               <a:t>Check Fields</a:t>
+            </a:r>
+            <a:r>
+              <a:rPr sz="1700" b="0" i="0">
+                <a:solidFill>
+                  <a:srgbClr val="263238"/>
+                </a:solidFill>
+                <a:latin typeface="Segoe UI"/>
+                <a:ea typeface="Segoe UI"/>
+                <a:cs typeface="Segoe UI"/>
+              </a:rPr>
+              <a:t> kiểm tra cột</a:t>
             </a:r>
           </a:p>
         </p:txBody>
@@ -10172,7 +10183,7 @@
                 <a:ea typeface="Segoe UI"/>
                 <a:cs typeface="Segoe UI"/>
               </a:rPr>
-              <a:t> xuất nhanh ra Excel, mở luôn</a:t>
+              <a:t> xuất nhanh ra Excel và mở luôn</a:t>
             </a:r>
           </a:p>
           <a:p>
@@ -10292,7 +10303,7 @@
                 <a:ea typeface="Segoe UI"/>
                 <a:cs typeface="Segoe UI"/>
               </a:rPr>
-              <a:t>Excel giữ số 0 đầu mã, kiểu số / ngày</a:t>
+              <a:t>Excel giữ số 0 đầu mã, kiểu số và ngày</a:t>
             </a:r>
           </a:p>
         </p:txBody>
@@ -10473,7 +10484,7 @@
                 <a:ea typeface="Segoe UI"/>
                 <a:cs typeface="Segoe UI"/>
               </a:rPr>
-              <a:t>🐞 bật Debug từng bước → </a:t>
+              <a:t>Bật 🐞 Debug từng bước rồi bấm </a:t>
             </a:r>
             <a:r>
               <a:rPr sz="1500" b="0" i="0">
@@ -10524,7 +10535,7 @@
                 <a:ea typeface="Segoe UI"/>
                 <a:cs typeface="Segoe UI"/>
               </a:rPr>
-              <a:t> bước · </a:t>
+              <a:t> chạy một bước · </a:t>
             </a:r>
             <a:r>
               <a:rPr sz="1500" b="0" i="0">
@@ -10575,7 +10586,7 @@
                 <a:ea typeface="Segoe UI"/>
                 <a:cs typeface="Segoe UI"/>
               </a:rPr>
-              <a:t>Bảng </a:t>
+              <a:t>Xem giá trị ở bảng </a:t>
             </a:r>
             <a:r>
               <a:rPr sz="1600" b="1" i="0">
@@ -11215,7 +11226,7 @@
                 <a:ea typeface="Segoe UI"/>
                 <a:cs typeface="Segoe UI"/>
               </a:rPr>
-              <a:t> Liệt kê 20 khách hàng còn dùng kèm tên nhân viên bán hàng.</a:t>
+              <a:t> Liệt kê 20 khách hàng còn sử dụng, kèm tên nhân viên bán hàng.</a:t>
             </a:r>
           </a:p>
           <a:p>
@@ -11255,7 +11266,7 @@
                 <a:ea typeface="Segoe UI"/>
                 <a:cs typeface="Segoe UI"/>
               </a:rPr>
-              <a:t> Tổng số lượng, tiền nhập theo vật tư trong 1 tháng; chỉ lấy vật tư &gt; 100 triệu.</a:t>
+              <a:t> Tính tổng số lượng và tiền nhập của từng vật tư trong 1 tháng; chỉ lấy vật tư có tiền nhập trên 100 triệu.</a:t>
             </a:r>
           </a:p>
           <a:p>
@@ -11317,7 +11328,7 @@
                 <a:ea typeface="Segoe UI"/>
                 <a:cs typeface="Segoe UI"/>
               </a:rPr>
-              <a:t> và bằng Save as CSV; so sánh mã có số 0 đầu.</a:t>
+              <a:t> và bằng Save as CSV; so sánh cách hai file hiện các mã có số 0 ở đầu.</a:t>
             </a:r>
           </a:p>
         </p:txBody>
@@ -11663,7 +11674,7 @@
                 <a:ea typeface="Segoe UI"/>
                 <a:cs typeface="Segoe UI"/>
               </a:rPr>
-              <a:t> Viết 5 câu truy vấn trả lời 5 câu hỏi nghiệp vụ người hướng dẫn giao (vd khách nào chưa phát sinh chứng từ trong năm).</a:t>
+              <a:t> Viết 5 câu truy vấn trả lời 5 câu hỏi nghiệp vụ do người hướng dẫn giao (ví dụ: khách nào chưa phát sinh chứng từ trong năm).</a:t>
             </a:r>
           </a:p>
         </p:txBody>
